--- a/poc/tasks/incident_response_annotated_deck/artifacts/seed.pptx
+++ b/poc/tasks/incident_response_annotated_deck/artifacts/seed.pptx
@@ -3334,7 +3334,52 @@
       <p:grpSpPr/>
       <p:sp>
         <p:nvSpPr>
-          <p:cNvPr id="2" name="TextBox 1"/>
+          <p:cNvPr id="2" name="Rectangle 1"/>
+          <p:cNvSpPr/>
+          <p:nvPr/>
+        </p:nvSpPr>
+        <p:spPr>
+          <a:xfrm>
+            <a:off x="0" y="0"/>
+            <a:ext cx="12188952" cy="164592"/>
+          </a:xfrm>
+          <a:prstGeom prst="rect">
+            <a:avLst/>
+          </a:prstGeom>
+          <a:solidFill>
+            <a:srgbClr val="1F4E79"/>
+          </a:solidFill>
+          <a:ln w="15875">
+            <a:solidFill>
+              <a:srgbClr val="1F4E79"/>
+            </a:solidFill>
+          </a:ln>
+        </p:spPr>
+        <p:style>
+          <a:lnRef idx="1">
+            <a:schemeClr val="accent1"/>
+          </a:lnRef>
+          <a:fillRef idx="3">
+            <a:schemeClr val="accent1"/>
+          </a:fillRef>
+          <a:effectRef idx="2">
+            <a:schemeClr val="accent1"/>
+          </a:effectRef>
+          <a:fontRef idx="minor">
+            <a:schemeClr val="lt1"/>
+          </a:fontRef>
+        </p:style>
+        <p:txBody>
+          <a:bodyPr rtlCol="0" anchor="ctr"/>
+          <a:lstStyle/>
+          <a:p>
+            <a:pPr algn="ctr"/>
+          </a:p>
+        </p:txBody>
+      </p:sp>
+      <p:sp>
+        <p:nvSpPr>
+          <p:cNvPr id="3" name="TextBox 2"/>
           <p:cNvSpPr txBox="1"/>
           <p:nvPr/>
         </p:nvSpPr>
@@ -3367,7 +3412,7 @@
       </p:sp>
       <p:sp>
         <p:nvSpPr>
-          <p:cNvPr id="3" name="TextBox 2"/>
+          <p:cNvPr id="4" name="TextBox 3"/>
           <p:cNvSpPr txBox="1"/>
           <p:nvPr/>
         </p:nvSpPr>
@@ -3400,14 +3445,14 @@
       </p:sp>
       <p:sp>
         <p:nvSpPr>
-          <p:cNvPr id="4" name="MTTA 8 min"/>
+          <p:cNvPr id="5" name="MTTA 8 min&#10;Target &lt;=10 min"/>
           <p:cNvSpPr/>
           <p:nvPr/>
         </p:nvSpPr>
         <p:spPr>
           <a:xfrm>
             <a:off x="749808" y="1353312"/>
-            <a:ext cx="3063240" cy="694944"/>
+            <a:ext cx="2816352" cy="859536"/>
           </a:xfrm>
           <a:prstGeom prst="roundRect">
             <a:avLst/>
@@ -3415,7 +3460,7 @@
           <a:solidFill>
             <a:srgbClr val="E7F1FB"/>
           </a:solidFill>
-          <a:ln w="15875">
+          <a:ln w="19050">
             <a:solidFill>
               <a:srgbClr val="AEC1D3"/>
             </a:solidFill>
@@ -3441,26 +3486,27 @@
           <a:p>
             <a:pPr algn="ctr"/>
             <a:r>
-              <a:rPr sz="2000" b="1">
+              <a:rPr sz="1500" b="1">
                 <a:solidFill>
                   <a:srgbClr val="172033"/>
                 </a:solidFill>
               </a:rPr>
-              <a:t>MTTA 8 min</a:t>
-            </a:r>
-          </a:p>
-        </p:txBody>
-      </p:sp>
-      <p:sp>
-        <p:nvSpPr>
-          <p:cNvPr id="5" name="Backlog 42"/>
+              <a:t>MTTA 8 min
+Target &lt;=10 min</a:t>
+            </a:r>
+          </a:p>
+        </p:txBody>
+      </p:sp>
+      <p:sp>
+        <p:nvSpPr>
+          <p:cNvPr id="6" name="Backlog 42&#10;15 need review"/>
           <p:cNvSpPr/>
           <p:nvPr/>
         </p:nvSpPr>
         <p:spPr>
           <a:xfrm>
             <a:off x="7882127" y="1115568"/>
-            <a:ext cx="3063240" cy="694944"/>
+            <a:ext cx="2816352" cy="859536"/>
           </a:xfrm>
           <a:prstGeom prst="roundRect">
             <a:avLst/>
@@ -3468,7 +3514,7 @@
           <a:solidFill>
             <a:srgbClr val="E7F1FB"/>
           </a:solidFill>
-          <a:ln w="15875">
+          <a:ln w="19050">
             <a:solidFill>
               <a:srgbClr val="AEC1D3"/>
             </a:solidFill>
@@ -3494,26 +3540,27 @@
           <a:p>
             <a:pPr algn="ctr"/>
             <a:r>
-              <a:rPr sz="2000" b="1">
+              <a:rPr sz="1500" b="1">
                 <a:solidFill>
                   <a:srgbClr val="172033"/>
                 </a:solidFill>
               </a:rPr>
-              <a:t>Backlog 42</a:t>
-            </a:r>
-          </a:p>
-        </p:txBody>
-      </p:sp>
-      <p:sp>
-        <p:nvSpPr>
-          <p:cNvPr id="6" name="Coverage 92%"/>
+              <a:t>Backlog 42
+15 need review</a:t>
+            </a:r>
+          </a:p>
+        </p:txBody>
+      </p:sp>
+      <p:sp>
+        <p:nvSpPr>
+          <p:cNvPr id="7" name="Coverage 92%&#10;Weekend rota live"/>
           <p:cNvSpPr/>
           <p:nvPr/>
         </p:nvSpPr>
         <p:spPr>
           <a:xfrm>
             <a:off x="4160520" y="5321808"/>
-            <a:ext cx="3063240" cy="694944"/>
+            <a:ext cx="2816352" cy="859536"/>
           </a:xfrm>
           <a:prstGeom prst="roundRect">
             <a:avLst/>
@@ -3521,7 +3568,7 @@
           <a:solidFill>
             <a:srgbClr val="E7F1FB"/>
           </a:solidFill>
-          <a:ln w="15875">
+          <a:ln w="19050">
             <a:solidFill>
               <a:srgbClr val="AEC1D3"/>
             </a:solidFill>
@@ -3547,19 +3594,20 @@
           <a:p>
             <a:pPr algn="ctr"/>
             <a:r>
-              <a:rPr sz="2000" b="1">
+              <a:rPr sz="1500" b="1">
                 <a:solidFill>
                   <a:srgbClr val="172033"/>
                 </a:solidFill>
               </a:rPr>
-              <a:t>Coverage 92%</a:t>
-            </a:r>
-          </a:p>
-        </p:txBody>
-      </p:sp>
-      <p:sp>
-        <p:nvSpPr>
-          <p:cNvPr id="7" name="incident_trend_panel_seed"/>
+              <a:t>Coverage 92%
+Weekend rota live</a:t>
+            </a:r>
+          </a:p>
+        </p:txBody>
+      </p:sp>
+      <p:sp>
+        <p:nvSpPr>
+          <p:cNvPr id="8" name="incident_trend_panel_seed"/>
           <p:cNvSpPr/>
           <p:nvPr/>
         </p:nvSpPr>
@@ -3614,7 +3662,7 @@
       </p:sp>
       <p:sp>
         <p:nvSpPr>
-          <p:cNvPr id="8" name="sev2_queue_risk_seed"/>
+          <p:cNvPr id="9" name="sev2_queue_risk_seed"/>
           <p:cNvSpPr/>
           <p:nvPr/>
         </p:nvSpPr>
@@ -3669,7 +3717,7 @@
       </p:sp>
       <p:sp>
         <p:nvSpPr>
-          <p:cNvPr id="9" name="Rounded Rectangle 8"/>
+          <p:cNvPr id="10" name="Rounded Rectangle 9"/>
           <p:cNvSpPr/>
           <p:nvPr/>
         </p:nvSpPr>
